--- a/materials/pdf/original/DS10_Folien_Keller-Profis.pptx
+++ b/materials/pdf/original/DS10_Folien_Keller-Profis.pptx
@@ -124,18 +124,18 @@
   <p:extLst>
     <p:ext uri="{521415D9-36F7-43E2-AB2F-B90AF26B5E84}">
       <p14:sectionLst xmlns:p14="http://schemas.microsoft.com/office/powerpoint/2010/main">
-        <p14:section name="Start" id="{df66310a-482a-0f10-84cf-8b2068087075}">
+        <p14:section name="Start" id="{bee42d5d-0955-7cde-2297-86507171e417}">
           <p14:sldIdLst>
             <p14:sldId id="256"/>
           </p14:sldIdLst>
         </p14:section>
-        <p14:section name="Einstieg" id="{b90735d0-6729-95ed-a71d-17fc7b182f1a}">
+        <p14:section name="Einstieg" id="{4b2339b1-bc50-6d3c-9667-edf06dfbc1f7}">
           <p14:sldIdLst>
             <p14:sldId id="257"/>
             <p14:sldId id="258"/>
           </p14:sldIdLst>
         </p14:section>
-        <p14:section name="Erarbeitung" id="{58a1a400-b18a-4f69-6200-a9da066f64d8}">
+        <p14:section name="Erarbeitung" id="{6dbb265e-d28a-c76c-cc96-0acf9390b095}">
           <p14:sldIdLst>
             <p14:sldId id="259"/>
             <p14:sldId id="260"/>
@@ -145,7 +145,7 @@
             <p14:sldId id="264"/>
           </p14:sldIdLst>
         </p14:section>
-        <p14:section name="Werkstatt" id="{70d08d14-1fe6-3c84-93a3-793e9316f281}">
+        <p14:section name="Werkstatt" id="{7a6bfda7-1fd2-c81d-7a4f-c5dba577f5c7}">
           <p14:sldIdLst>
             <p14:sldId id="265"/>
             <p14:sldId id="266"/>
@@ -154,14 +154,14 @@
             <p14:sldId id="269"/>
           </p14:sldIdLst>
         </p14:section>
-        <p14:section name="Sicherung" id="{22dd33ca-5a2c-0c25-7f4b-c29a2264bfb4}">
+        <p14:section name="Sicherung" id="{3378d09e-3146-e93f-ad25-247335743c60}">
           <p14:sldIdLst>
             <p14:sldId id="270"/>
             <p14:sldId id="271"/>
             <p14:sldId id="272"/>
           </p14:sldIdLst>
         </p14:section>
-        <p14:section name="Abschluss" id="{da3198d6-09e2-72b5-a5da-90fc2f011bb0}">
+        <p14:section name="Abschluss" id="{3d1a8aea-2a42-8a57-ee83-907094cdb7c1}">
           <p14:sldIdLst>
             <p14:sldId id="273"/>
           </p14:sldIdLst>
@@ -1890,7 +1890,7 @@
           <a:p>
             <a:r>
               <a:rPr lang="en-US" dirty="0"/>
-              <a:t>Gemeinsam an der Tafel. Nur der Wechsel nach 2 Zeichen führt zum Ziel – und das reicht.</a:t>
+              <a:t>[NUR LEHRKRAFT] Gemeinsam an der Tafel. Nur der Wechsel nach 2 Zeichen führt zum Ziel – und das reicht.</a:t>
             </a:r>
             <a:endParaRPr lang="en-US" dirty="0"/>
           </a:p>

--- a/materials/pdf/original/DS10_Folien_Keller-Profis.pptx
+++ b/materials/pdf/original/DS10_Folien_Keller-Profis.pptx
@@ -124,18 +124,18 @@
   <p:extLst>
     <p:ext uri="{521415D9-36F7-43E2-AB2F-B90AF26B5E84}">
       <p14:sectionLst xmlns:p14="http://schemas.microsoft.com/office/powerpoint/2010/main">
-        <p14:section name="Start" id="{bee42d5d-0955-7cde-2297-86507171e417}">
+        <p14:section name="Start" id="{4a5ad851-1b54-4e7b-5f05-82cde06d7e9f}">
           <p14:sldIdLst>
             <p14:sldId id="256"/>
           </p14:sldIdLst>
         </p14:section>
-        <p14:section name="Einstieg" id="{4b2339b1-bc50-6d3c-9667-edf06dfbc1f7}">
+        <p14:section name="Einstieg" id="{f6825b88-258b-72f6-5bee-5f00ef506ad9}">
           <p14:sldIdLst>
             <p14:sldId id="257"/>
             <p14:sldId id="258"/>
           </p14:sldIdLst>
         </p14:section>
-        <p14:section name="Erarbeitung" id="{6dbb265e-d28a-c76c-cc96-0acf9390b095}">
+        <p14:section name="Erarbeitung" id="{a1091719-efb9-8ba5-996d-4b76a0612318}">
           <p14:sldIdLst>
             <p14:sldId id="259"/>
             <p14:sldId id="260"/>
@@ -145,7 +145,7 @@
             <p14:sldId id="264"/>
           </p14:sldIdLst>
         </p14:section>
-        <p14:section name="Werkstatt" id="{7a6bfda7-1fd2-c81d-7a4f-c5dba577f5c7}">
+        <p14:section name="Werkstatt" id="{f3e07f23-0642-4b0d-9864-232034ac5f32}">
           <p14:sldIdLst>
             <p14:sldId id="265"/>
             <p14:sldId id="266"/>
@@ -154,14 +154,14 @@
             <p14:sldId id="269"/>
           </p14:sldIdLst>
         </p14:section>
-        <p14:section name="Sicherung" id="{3378d09e-3146-e93f-ad25-247335743c60}">
+        <p14:section name="Sicherung" id="{6ad162c7-4e71-ecc6-08ec-310642da1a08}">
           <p14:sldIdLst>
             <p14:sldId id="270"/>
             <p14:sldId id="271"/>
             <p14:sldId id="272"/>
           </p14:sldIdLst>
         </p14:section>
-        <p14:section name="Abschluss" id="{3d1a8aea-2a42-8a57-ee83-907094cdb7c1}">
+        <p14:section name="Abschluss" id="{8fc74d8a-3681-dd3e-7c9d-f982f6bd85bc}">
           <p14:sldIdLst>
             <p14:sldId id="273"/>
           </p14:sldIdLst>
@@ -2393,6 +2393,45 @@
       </p:sp>
       <p:sp>
         <p:nvSpPr>
+          <p:cNvPr id="4" name="Text 1"/>
+          <p:cNvSpPr/>
+          <p:nvPr/>
+        </p:nvSpPr>
+        <p:spPr>
+          <a:xfrm>
+            <a:off x="7985455" y="6473952"/>
+            <a:ext cx="2926080" cy="274320"/>
+          </a:xfrm>
+          <a:prstGeom prst="rect">
+            <a:avLst/>
+          </a:prstGeom>
+          <a:noFill/>
+          <a:ln/>
+        </p:spPr>
+        <p:txBody>
+          <a:bodyPr wrap="square" lIns="0" tIns="0" rIns="0" bIns="0" rtlCol="0" anchor="ctr"/>
+          <a:lstStyle/>
+          <a:p>
+            <a:pPr algn="r" indent="0" marL="0">
+              <a:buNone/>
+            </a:pPr>
+            <a:r>
+              <a:rPr lang="en-US" sz="1100" dirty="0">
+                <a:solidFill>
+                  <a:srgbClr val="5B6770"/>
+                </a:solidFill>
+                <a:latin typeface="Calibri" pitchFamily="34" charset="0"/>
+                <a:ea typeface="Calibri" pitchFamily="34" charset="-122"/>
+                <a:cs typeface="Calibri" pitchFamily="34" charset="-120"/>
+              </a:rPr>
+              <a:t>CC BY-SA 4.0 · Frank Juchim</a:t>
+            </a:r>
+            <a:endParaRPr lang="en-US" sz="1100" dirty="0"/>
+          </a:p>
+        </p:txBody>
+      </p:sp>
+      <p:sp>
+        <p:nvSpPr>
           <p:cNvPr id="25" name="Slide Number Placeholder 0"/>
           <p:cNvSpPr>
             <a:spLocks noGrp="1"/>
@@ -2544,6 +2583,45 @@
                 <a:cs typeface="Calibri" pitchFamily="34" charset="-120"/>
               </a:rPr>
               <a:t>Level 10 · Welt B · Grenzen &amp; Keller · nur eA (Leistungskurs)</a:t>
+            </a:r>
+            <a:endParaRPr lang="en-US" sz="1100" dirty="0"/>
+          </a:p>
+        </p:txBody>
+      </p:sp>
+      <p:sp>
+        <p:nvSpPr>
+          <p:cNvPr id="4" name="Text 1"/>
+          <p:cNvSpPr/>
+          <p:nvPr/>
+        </p:nvSpPr>
+        <p:spPr>
+          <a:xfrm>
+            <a:off x="7985455" y="6473952"/>
+            <a:ext cx="2926080" cy="274320"/>
+          </a:xfrm>
+          <a:prstGeom prst="rect">
+            <a:avLst/>
+          </a:prstGeom>
+          <a:noFill/>
+          <a:ln/>
+        </p:spPr>
+        <p:txBody>
+          <a:bodyPr wrap="square" lIns="0" tIns="0" rIns="0" bIns="0" rtlCol="0" anchor="ctr"/>
+          <a:lstStyle/>
+          <a:p>
+            <a:pPr algn="r" indent="0" marL="0">
+              <a:buNone/>
+            </a:pPr>
+            <a:r>
+              <a:rPr lang="en-US" sz="1100" dirty="0">
+                <a:solidFill>
+                  <a:srgbClr val="5B6770"/>
+                </a:solidFill>
+                <a:latin typeface="Calibri" pitchFamily="34" charset="0"/>
+                <a:ea typeface="Calibri" pitchFamily="34" charset="-122"/>
+                <a:cs typeface="Calibri" pitchFamily="34" charset="-120"/>
+              </a:rPr>
+              <a:t>CC BY-SA 4.0 · Frank Juchim</a:t>
             </a:r>
             <a:endParaRPr lang="en-US" sz="1100" dirty="0"/>
           </a:p>
